--- a/releases/Instructions.pptx
+++ b/releases/Instructions.pptx
@@ -5,7 +5,7 @@
     <p:sldMasterId id="2147483648" r:id="rId1"/>
   </p:sldMasterIdLst>
   <p:notesMasterIdLst>
-    <p:notesMasterId r:id="rId9"/>
+    <p:notesMasterId r:id="rId10"/>
   </p:notesMasterIdLst>
   <p:sldIdLst>
     <p:sldId id="256" r:id="rId2"/>
@@ -15,6 +15,7 @@
     <p:sldId id="260" r:id="rId6"/>
     <p:sldId id="261" r:id="rId7"/>
     <p:sldId id="262" r:id="rId8"/>
+    <p:sldId id="263" r:id="rId9"/>
   </p:sldIdLst>
   <p:sldSz cx="12192000" cy="6858000"/>
   <p:notesSz cx="6858000" cy="9144000"/>
@@ -203,7 +204,7 @@
           <a:p>
             <a:fld id="{F378454F-002F-4D12-85FD-D5BF089A347B}" type="datetimeFigureOut">
               <a:rPr lang="en-IN" smtClean="0"/>
-              <a:t>28-04-2026</a:t>
+              <a:t>29-04-2026</a:t>
             </a:fld>
             <a:endParaRPr lang="en-IN"/>
           </a:p>
@@ -920,7 +921,7 @@
           <a:p>
             <a:fld id="{210E5AF3-D87E-4F83-9098-4B07D2CD908E}" type="datetimeFigureOut">
               <a:rPr lang="en-IN" smtClean="0"/>
-              <a:t>28-04-2026</a:t>
+              <a:t>29-04-2026</a:t>
             </a:fld>
             <a:endParaRPr lang="en-IN"/>
           </a:p>
@@ -1120,7 +1121,7 @@
           <a:p>
             <a:fld id="{210E5AF3-D87E-4F83-9098-4B07D2CD908E}" type="datetimeFigureOut">
               <a:rPr lang="en-IN" smtClean="0"/>
-              <a:t>28-04-2026</a:t>
+              <a:t>29-04-2026</a:t>
             </a:fld>
             <a:endParaRPr lang="en-IN"/>
           </a:p>
@@ -1330,7 +1331,7 @@
           <a:p>
             <a:fld id="{210E5AF3-D87E-4F83-9098-4B07D2CD908E}" type="datetimeFigureOut">
               <a:rPr lang="en-IN" smtClean="0"/>
-              <a:t>28-04-2026</a:t>
+              <a:t>29-04-2026</a:t>
             </a:fld>
             <a:endParaRPr lang="en-IN"/>
           </a:p>
@@ -1530,7 +1531,7 @@
           <a:p>
             <a:fld id="{210E5AF3-D87E-4F83-9098-4B07D2CD908E}" type="datetimeFigureOut">
               <a:rPr lang="en-IN" smtClean="0"/>
-              <a:t>28-04-2026</a:t>
+              <a:t>29-04-2026</a:t>
             </a:fld>
             <a:endParaRPr lang="en-IN"/>
           </a:p>
@@ -1806,7 +1807,7 @@
           <a:p>
             <a:fld id="{210E5AF3-D87E-4F83-9098-4B07D2CD908E}" type="datetimeFigureOut">
               <a:rPr lang="en-IN" smtClean="0"/>
-              <a:t>28-04-2026</a:t>
+              <a:t>29-04-2026</a:t>
             </a:fld>
             <a:endParaRPr lang="en-IN"/>
           </a:p>
@@ -2074,7 +2075,7 @@
           <a:p>
             <a:fld id="{210E5AF3-D87E-4F83-9098-4B07D2CD908E}" type="datetimeFigureOut">
               <a:rPr lang="en-IN" smtClean="0"/>
-              <a:t>28-04-2026</a:t>
+              <a:t>29-04-2026</a:t>
             </a:fld>
             <a:endParaRPr lang="en-IN"/>
           </a:p>
@@ -2489,7 +2490,7 @@
           <a:p>
             <a:fld id="{210E5AF3-D87E-4F83-9098-4B07D2CD908E}" type="datetimeFigureOut">
               <a:rPr lang="en-IN" smtClean="0"/>
-              <a:t>28-04-2026</a:t>
+              <a:t>29-04-2026</a:t>
             </a:fld>
             <a:endParaRPr lang="en-IN"/>
           </a:p>
@@ -2631,7 +2632,7 @@
           <a:p>
             <a:fld id="{210E5AF3-D87E-4F83-9098-4B07D2CD908E}" type="datetimeFigureOut">
               <a:rPr lang="en-IN" smtClean="0"/>
-              <a:t>28-04-2026</a:t>
+              <a:t>29-04-2026</a:t>
             </a:fld>
             <a:endParaRPr lang="en-IN"/>
           </a:p>
@@ -2744,7 +2745,7 @@
           <a:p>
             <a:fld id="{210E5AF3-D87E-4F83-9098-4B07D2CD908E}" type="datetimeFigureOut">
               <a:rPr lang="en-IN" smtClean="0"/>
-              <a:t>28-04-2026</a:t>
+              <a:t>29-04-2026</a:t>
             </a:fld>
             <a:endParaRPr lang="en-IN"/>
           </a:p>
@@ -3057,7 +3058,7 @@
           <a:p>
             <a:fld id="{210E5AF3-D87E-4F83-9098-4B07D2CD908E}" type="datetimeFigureOut">
               <a:rPr lang="en-IN" smtClean="0"/>
-              <a:t>28-04-2026</a:t>
+              <a:t>29-04-2026</a:t>
             </a:fld>
             <a:endParaRPr lang="en-IN"/>
           </a:p>
@@ -3346,7 +3347,7 @@
           <a:p>
             <a:fld id="{210E5AF3-D87E-4F83-9098-4B07D2CD908E}" type="datetimeFigureOut">
               <a:rPr lang="en-IN" smtClean="0"/>
-              <a:t>28-04-2026</a:t>
+              <a:t>29-04-2026</a:t>
             </a:fld>
             <a:endParaRPr lang="en-IN"/>
           </a:p>
@@ -3589,7 +3590,7 @@
           <a:p>
             <a:fld id="{210E5AF3-D87E-4F83-9098-4B07D2CD908E}" type="datetimeFigureOut">
               <a:rPr lang="en-IN" smtClean="0"/>
-              <a:t>28-04-2026</a:t>
+              <a:t>29-04-2026</a:t>
             </a:fld>
             <a:endParaRPr lang="en-IN"/>
           </a:p>
@@ -5729,8 +5730,8 @@
         </p:nvSpPr>
         <p:spPr>
           <a:xfrm>
-            <a:off x="838200" y="1250792"/>
-            <a:ext cx="4811486" cy="5242083"/>
+            <a:off x="838200" y="1219200"/>
+            <a:ext cx="4811486" cy="5273675"/>
           </a:xfrm>
         </p:spPr>
         <p:txBody>
@@ -5743,7 +5744,7 @@
               <a:buNone/>
             </a:pPr>
             <a:r>
-              <a:rPr lang="en-IN" sz="2200" dirty="0">
+              <a:rPr lang="en-IN" sz="2000" dirty="0">
                 <a:latin typeface="Cascadia Code" panose="020B0609020000020004" pitchFamily="49" charset="0"/>
                 <a:ea typeface="Cascadia Code" panose="020B0609020000020004" pitchFamily="49" charset="0"/>
                 <a:cs typeface="Cascadia Code" panose="020B0609020000020004" pitchFamily="49" charset="0"/>
@@ -5756,12 +5757,12 @@
               <a:buNone/>
             </a:pPr>
             <a:r>
-              <a:rPr lang="en-IN" sz="2200" dirty="0">
+              <a:rPr lang="en-IN" sz="2000" dirty="0">
                 <a:latin typeface="Cascadia Code" panose="020B0609020000020004" pitchFamily="49" charset="0"/>
                 <a:ea typeface="Cascadia Code" panose="020B0609020000020004" pitchFamily="49" charset="0"/>
                 <a:cs typeface="Cascadia Code" panose="020B0609020000020004" pitchFamily="49" charset="0"/>
               </a:rPr>
-              <a:t>This wont take effect until you retrain the network by running Train.bat and reopen the program.</a:t>
+              <a:t>This wont take effect until you retrain the network by running Train.jar and reopen the program. To run Train.jar, open the terminal in that directory and run java –jar Train.jar and wait for it to say TRAINING DONE</a:t>
             </a:r>
           </a:p>
           <a:p>
@@ -5769,7 +5770,7 @@
               <a:buNone/>
             </a:pPr>
             <a:r>
-              <a:rPr lang="en-IN" sz="2200" dirty="0">
+              <a:rPr lang="en-IN" sz="2000" dirty="0">
                 <a:latin typeface="Cascadia Code" panose="020B0609020000020004" pitchFamily="49" charset="0"/>
                 <a:ea typeface="Cascadia Code" panose="020B0609020000020004" pitchFamily="49" charset="0"/>
                 <a:cs typeface="Cascadia Code" panose="020B0609020000020004" pitchFamily="49" charset="0"/>
@@ -5823,7 +5824,7 @@
         </p:nvSpPr>
         <p:spPr>
           <a:xfrm rot="8545122">
-            <a:off x="6187019" y="5153182"/>
+            <a:off x="6758520" y="5224741"/>
             <a:ext cx="281509" cy="685800"/>
           </a:xfrm>
           <a:prstGeom prst="upArrow">
@@ -5877,7 +5878,7 @@
         </p:nvSpPr>
         <p:spPr>
           <a:xfrm rot="10006499">
-            <a:off x="7243385" y="5161601"/>
+            <a:off x="7786333" y="5147338"/>
             <a:ext cx="281509" cy="685800"/>
           </a:xfrm>
           <a:prstGeom prst="upArrow">
@@ -6160,7 +6161,7 @@
               <a:buNone/>
             </a:pPr>
             <a:r>
-              <a:rPr lang="en-IN" sz="2400" dirty="0">
+              <a:rPr lang="en-IN" sz="2000" dirty="0">
                 <a:latin typeface="Cascadia Code" panose="020B0609020000020004" pitchFamily="49" charset="0"/>
                 <a:ea typeface="Cascadia Code" panose="020B0609020000020004" pitchFamily="49" charset="0"/>
                 <a:cs typeface="Cascadia Code" panose="020B0609020000020004" pitchFamily="49" charset="0"/>
@@ -6172,7 +6173,96 @@
             <a:pPr marL="0" indent="0">
               <a:buNone/>
             </a:pPr>
-            <a:endParaRPr lang="en-IN" sz="2400" dirty="0">
+            <a:r>
+              <a:rPr lang="en-US" sz="2000" dirty="0">
+                <a:latin typeface="Cascadia Code" panose="020B0609020000020004" pitchFamily="49" charset="0"/>
+                <a:ea typeface="Cascadia Code" panose="020B0609020000020004" pitchFamily="49" charset="0"/>
+                <a:cs typeface="Cascadia Code" panose="020B0609020000020004" pitchFamily="49" charset="0"/>
+              </a:rPr>
+              <a:t>1. java : The term ‘java' is not recognized as the name of a cmdlet, function, script file, or operable program.</a:t>
+            </a:r>
+          </a:p>
+          <a:p>
+            <a:pPr marL="0" indent="0">
+              <a:buNone/>
+            </a:pPr>
+            <a:r>
+              <a:rPr lang="en-US" sz="2000" dirty="0">
+                <a:latin typeface="Cascadia Code" panose="020B0609020000020004" pitchFamily="49" charset="0"/>
+                <a:ea typeface="Cascadia Code" panose="020B0609020000020004" pitchFamily="49" charset="0"/>
+                <a:cs typeface="Cascadia Code" panose="020B0609020000020004" pitchFamily="49" charset="0"/>
+              </a:rPr>
+              <a:t>Solution: Java isn’t installed or isn’t in PATH.</a:t>
+            </a:r>
+          </a:p>
+          <a:p>
+            <a:pPr marL="0" indent="0">
+              <a:buNone/>
+            </a:pPr>
+            <a:r>
+              <a:rPr lang="en-US" sz="2000" dirty="0">
+                <a:latin typeface="Cascadia Code" panose="020B0609020000020004" pitchFamily="49" charset="0"/>
+                <a:ea typeface="Cascadia Code" panose="020B0609020000020004" pitchFamily="49" charset="0"/>
+                <a:cs typeface="Cascadia Code" panose="020B0609020000020004" pitchFamily="49" charset="0"/>
+              </a:rPr>
+              <a:t>2. Exception in thread "main" </a:t>
+            </a:r>
+            <a:r>
+              <a:rPr lang="en-US" sz="2000" dirty="0" err="1">
+                <a:latin typeface="Cascadia Code" panose="020B0609020000020004" pitchFamily="49" charset="0"/>
+                <a:ea typeface="Cascadia Code" panose="020B0609020000020004" pitchFamily="49" charset="0"/>
+                <a:cs typeface="Cascadia Code" panose="020B0609020000020004" pitchFamily="49" charset="0"/>
+              </a:rPr>
+              <a:t>java.io.FileNotFoundException</a:t>
+            </a:r>
+            <a:r>
+              <a:rPr lang="en-US" sz="2000" dirty="0">
+                <a:latin typeface="Cascadia Code" panose="020B0609020000020004" pitchFamily="49" charset="0"/>
+                <a:ea typeface="Cascadia Code" panose="020B0609020000020004" pitchFamily="49" charset="0"/>
+                <a:cs typeface="Cascadia Code" panose="020B0609020000020004" pitchFamily="49" charset="0"/>
+              </a:rPr>
+              <a:t>: weights.txt (The system cannot find the file specified)</a:t>
+            </a:r>
+          </a:p>
+          <a:p>
+            <a:pPr marL="0" indent="0">
+              <a:buNone/>
+            </a:pPr>
+            <a:r>
+              <a:rPr lang="en-US" sz="2000" dirty="0">
+                <a:latin typeface="Cascadia Code" panose="020B0609020000020004" pitchFamily="49" charset="0"/>
+                <a:ea typeface="Cascadia Code" panose="020B0609020000020004" pitchFamily="49" charset="0"/>
+                <a:cs typeface="Cascadia Code" panose="020B0609020000020004" pitchFamily="49" charset="0"/>
+              </a:rPr>
+              <a:t>Solution: Ensure weights.txt is there in the correct working directory, or run train to generate one.</a:t>
+            </a:r>
+          </a:p>
+          <a:p>
+            <a:pPr marL="0" indent="0">
+              <a:buNone/>
+            </a:pPr>
+            <a:r>
+              <a:rPr lang="en-US" sz="2000" dirty="0">
+                <a:latin typeface="Cascadia Code" panose="020B0609020000020004" pitchFamily="49" charset="0"/>
+                <a:ea typeface="Cascadia Code" panose="020B0609020000020004" pitchFamily="49" charset="0"/>
+                <a:cs typeface="Cascadia Code" panose="020B0609020000020004" pitchFamily="49" charset="0"/>
+              </a:rPr>
+              <a:t>3. Invalid input! error when trying to save a file</a:t>
+            </a:r>
+          </a:p>
+          <a:p>
+            <a:pPr marL="0" indent="0">
+              <a:buNone/>
+            </a:pPr>
+            <a:r>
+              <a:rPr lang="en-US" sz="2000" dirty="0">
+                <a:latin typeface="Cascadia Code" panose="020B0609020000020004" pitchFamily="49" charset="0"/>
+                <a:ea typeface="Cascadia Code" panose="020B0609020000020004" pitchFamily="49" charset="0"/>
+                <a:cs typeface="Cascadia Code" panose="020B0609020000020004" pitchFamily="49" charset="0"/>
+              </a:rPr>
+              <a:t>Solution: Make sure the number in the spinner is from 0-9 only.</a:t>
+            </a:r>
+            <a:endParaRPr lang="en-IN" sz="2000" dirty="0">
               <a:latin typeface="Cascadia Code" panose="020B0609020000020004" pitchFamily="49" charset="0"/>
               <a:ea typeface="Cascadia Code" panose="020B0609020000020004" pitchFamily="49" charset="0"/>
               <a:cs typeface="Cascadia Code" panose="020B0609020000020004" pitchFamily="49" charset="0"/>
@@ -6240,6 +6330,187 @@
   <p:transition spd="slow">
     <p:push/>
   </p:transition>
+</p:sld>
+</file>
+
+<file path=ppt/slides/slide8.xml><?xml version="1.0" encoding="utf-8"?>
+<p:sld xmlns:a="http://schemas.openxmlformats.org/drawingml/2006/main" xmlns:r="http://schemas.openxmlformats.org/officeDocument/2006/relationships" xmlns:p="http://schemas.openxmlformats.org/presentationml/2006/main">
+  <p:cSld>
+    <p:bg>
+      <p:bgPr>
+        <a:solidFill>
+          <a:srgbClr val="EC3750"/>
+        </a:solidFill>
+        <a:effectLst/>
+      </p:bgPr>
+    </p:bg>
+    <p:spTree>
+      <p:nvGrpSpPr>
+        <p:cNvPr id="1" name="">
+          <a:extLst>
+            <a:ext uri="{FF2B5EF4-FFF2-40B4-BE49-F238E27FC236}">
+              <a16:creationId xmlns:a16="http://schemas.microsoft.com/office/drawing/2014/main" id="{0497E89B-A1D1-7EA4-D523-2B8EA7330626}"/>
+            </a:ext>
+          </a:extLst>
+        </p:cNvPr>
+        <p:cNvGrpSpPr/>
+        <p:nvPr/>
+      </p:nvGrpSpPr>
+      <p:grpSpPr>
+        <a:xfrm>
+          <a:off x="0" y="0"/>
+          <a:ext cx="0" cy="0"/>
+          <a:chOff x="0" y="0"/>
+          <a:chExt cx="0" cy="0"/>
+        </a:xfrm>
+      </p:grpSpPr>
+      <p:sp>
+        <p:nvSpPr>
+          <p:cNvPr id="2" name="Title 1">
+            <a:extLst>
+              <a:ext uri="{FF2B5EF4-FFF2-40B4-BE49-F238E27FC236}">
+                <a16:creationId xmlns:a16="http://schemas.microsoft.com/office/drawing/2014/main" id="{6618EEA5-D826-52F7-8CF6-A99C436273FA}"/>
+              </a:ext>
+            </a:extLst>
+          </p:cNvPr>
+          <p:cNvSpPr>
+            <a:spLocks noGrp="1"/>
+          </p:cNvSpPr>
+          <p:nvPr>
+            <p:ph type="ctrTitle"/>
+          </p:nvPr>
+        </p:nvSpPr>
+        <p:spPr>
+          <a:xfrm>
+            <a:off x="1524000" y="1492477"/>
+            <a:ext cx="9144000" cy="2387600"/>
+          </a:xfrm>
+        </p:spPr>
+        <p:txBody>
+          <a:bodyPr>
+            <a:normAutofit/>
+          </a:bodyPr>
+          <a:lstStyle/>
+          <a:p>
+            <a:r>
+              <a:rPr lang="en-IN" b="1" dirty="0">
+                <a:solidFill>
+                  <a:schemeClr val="bg1"/>
+                </a:solidFill>
+                <a:latin typeface="MS PGothic" panose="020B0600070205080204" pitchFamily="34" charset="-128"/>
+                <a:ea typeface="MS PGothic" panose="020B0600070205080204" pitchFamily="34" charset="-128"/>
+              </a:rPr>
+              <a:t>ok bye</a:t>
+            </a:r>
+          </a:p>
+        </p:txBody>
+      </p:sp>
+      <p:sp>
+        <p:nvSpPr>
+          <p:cNvPr id="3" name="Subtitle 2">
+            <a:extLst>
+              <a:ext uri="{FF2B5EF4-FFF2-40B4-BE49-F238E27FC236}">
+                <a16:creationId xmlns:a16="http://schemas.microsoft.com/office/drawing/2014/main" id="{0FCCC14F-F73D-B58F-2F5A-B8B2593199AA}"/>
+              </a:ext>
+            </a:extLst>
+          </p:cNvPr>
+          <p:cNvSpPr>
+            <a:spLocks noGrp="1"/>
+          </p:cNvSpPr>
+          <p:nvPr>
+            <p:ph type="subTitle" idx="1"/>
+          </p:nvPr>
+        </p:nvSpPr>
+        <p:spPr>
+          <a:xfrm>
+            <a:off x="1524000" y="3972152"/>
+            <a:ext cx="9144000" cy="1655762"/>
+          </a:xfrm>
+        </p:spPr>
+        <p:txBody>
+          <a:bodyPr>
+            <a:normAutofit/>
+          </a:bodyPr>
+          <a:lstStyle/>
+          <a:p>
+            <a:r>
+              <a:rPr lang="en-IN" sz="1200" dirty="0">
+                <a:solidFill>
+                  <a:schemeClr val="bg1"/>
+                </a:solidFill>
+              </a:rPr>
+              <a:t>that took way too long</a:t>
+            </a:r>
+          </a:p>
+          <a:p>
+            <a:r>
+              <a:rPr lang="en-IN" sz="1200" dirty="0">
+                <a:solidFill>
+                  <a:schemeClr val="bg1"/>
+                </a:solidFill>
+              </a:rPr>
+              <a:t>maybe I should have just used launch4j?</a:t>
+            </a:r>
+          </a:p>
+        </p:txBody>
+      </p:sp>
+      <p:pic>
+        <p:nvPicPr>
+          <p:cNvPr id="1026" name="Picture 2">
+            <a:extLst>
+              <a:ext uri="{FF2B5EF4-FFF2-40B4-BE49-F238E27FC236}">
+                <a16:creationId xmlns:a16="http://schemas.microsoft.com/office/drawing/2014/main" id="{95B9AADD-53F2-7A99-E5C1-FB601A2E3FC6}"/>
+              </a:ext>
+            </a:extLst>
+          </p:cNvPr>
+          <p:cNvPicPr>
+            <a:picLocks noChangeAspect="1" noChangeArrowheads="1"/>
+          </p:cNvPicPr>
+          <p:nvPr/>
+        </p:nvPicPr>
+        <p:blipFill>
+          <a:blip r:embed="rId2">
+            <a:extLst>
+              <a:ext uri="{28A0092B-C50C-407E-A947-70E740481C1C}">
+                <a14:useLocalDpi xmlns:a14="http://schemas.microsoft.com/office/drawing/2010/main" val="0"/>
+              </a:ext>
+            </a:extLst>
+          </a:blip>
+          <a:srcRect/>
+          <a:stretch>
+            <a:fillRect/>
+          </a:stretch>
+        </p:blipFill>
+        <p:spPr bwMode="auto">
+          <a:xfrm>
+            <a:off x="5486400" y="1785257"/>
+            <a:ext cx="1219200" cy="1219200"/>
+          </a:xfrm>
+          <a:prstGeom prst="rect">
+            <a:avLst/>
+          </a:prstGeom>
+          <a:noFill/>
+          <a:extLst>
+            <a:ext uri="{909E8E84-426E-40DD-AFC4-6F175D3DCCD1}">
+              <a14:hiddenFill xmlns:a14="http://schemas.microsoft.com/office/drawing/2010/main">
+                <a:solidFill>
+                  <a:srgbClr val="FFFFFF"/>
+                </a:solidFill>
+              </a14:hiddenFill>
+            </a:ext>
+          </a:extLst>
+        </p:spPr>
+      </p:pic>
+    </p:spTree>
+    <p:extLst>
+      <p:ext uri="{BB962C8B-B14F-4D97-AF65-F5344CB8AC3E}">
+        <p14:creationId xmlns:p14="http://schemas.microsoft.com/office/powerpoint/2010/main" val="3712718212"/>
+      </p:ext>
+    </p:extLst>
+  </p:cSld>
+  <p:clrMapOvr>
+    <a:masterClrMapping/>
+  </p:clrMapOvr>
 </p:sld>
 </file>
 
